--- a/assets/pptx/catalog-292.pptx
+++ b/assets/pptx/catalog-292.pptx
@@ -3247,7 +3247,7 @@
                 <a:ea typeface="Ebrima"/>
                 <a:cs typeface="Ebrima"/>
               </a:rPr>
-              <a:t>ፍቅር (7x) ፍቅር (7x)</a:t>
+              <a:t>ፍቅር 7x ፍቅር 7x</a:t>
             </a:r>
           </a:p>
           <a:p>
@@ -3265,7 +3265,7 @@
                 <a:ea typeface="Ebrima"/>
                 <a:cs typeface="Ebrima"/>
               </a:rPr>
-              <a:t>(የሰው ፍቅር) ዛሬ አብቦ ታይቶ</a:t>
+              <a:t>የሰው ፍቅር ዛሬ አብቦ ታይቶ</a:t>
             </a:r>
           </a:p>
           <a:p>
@@ -3283,7 +3283,7 @@
                 <a:ea typeface="Ebrima"/>
                 <a:cs typeface="Ebrima"/>
               </a:rPr>
-              <a:t>(የሰው ፍቅር) የማይጠፋ መስሎ</a:t>
+              <a:t>የሰው ፍቅር የማይጠፋ መስሎ</a:t>
             </a:r>
           </a:p>
           <a:p>
@@ -3301,7 +3301,7 @@
                 <a:ea typeface="Ebrima"/>
                 <a:cs typeface="Ebrima"/>
               </a:rPr>
-              <a:t>(የሰው ፍቅር) አብቦ ይረግፋል</a:t>
+              <a:t>የሰው ፍቅር አብቦ ይረግፋል</a:t>
             </a:r>
           </a:p>
           <a:p>
@@ -3319,7 +3319,7 @@
                 <a:ea typeface="Ebrima"/>
                 <a:cs typeface="Ebrima"/>
               </a:rPr>
-              <a:t>(የሰው ፍቅር) ደምቆ እንደበራ በድንገት ይጠፋል</a:t>
+              <a:t>የሰው ፍቅር ደምቆ እንደበራ በድንገት ይጠፋል</a:t>
             </a:r>
           </a:p>
         </p:txBody>
@@ -3422,7 +3422,7 @@
                 <a:ea typeface="Ebrima"/>
                 <a:cs typeface="Ebrima"/>
               </a:rPr>
-              <a:t>የዘለዓለሙን ነው (2x)</a:t>
+              <a:t>የዘለዓለሙን ነው 2x</a:t>
             </a:r>
           </a:p>
         </p:txBody>
@@ -3489,7 +3489,7 @@
                 <a:ea typeface="Ebrima"/>
                 <a:cs typeface="Ebrima"/>
               </a:rPr>
-              <a:t>ፍቅር (7x) ፍቅር (7x)</a:t>
+              <a:t>ፍቅር 7x ፍቅር 7x</a:t>
             </a:r>
           </a:p>
           <a:p>
@@ -3507,7 +3507,7 @@
                 <a:ea typeface="Ebrima"/>
                 <a:cs typeface="Ebrima"/>
               </a:rPr>
-              <a:t>(የሰው ፍቅር) በቃል ድርዳሬ</a:t>
+              <a:t>የሰው ፍቅር በቃል ድርዳሬ</a:t>
             </a:r>
           </a:p>
           <a:p>
@@ -3525,7 +3525,7 @@
                 <a:ea typeface="Ebrima"/>
                 <a:cs typeface="Ebrima"/>
               </a:rPr>
-              <a:t>(የሰው ፍቅር) አንደኛው በወሬ</a:t>
+              <a:t>የሰው ፍቅር አንደኛው በወሬ</a:t>
             </a:r>
           </a:p>
           <a:p>
@@ -3543,7 +3543,7 @@
                 <a:ea typeface="Ebrima"/>
                 <a:cs typeface="Ebrima"/>
               </a:rPr>
-              <a:t>(የሰው ፍቅር) ከቃላት አያልፍም</a:t>
+              <a:t>የሰው ፍቅር ከቃላት አያልፍም</a:t>
             </a:r>
           </a:p>
           <a:p>
@@ -3561,7 +3561,7 @@
                 <a:ea typeface="Ebrima"/>
                 <a:cs typeface="Ebrima"/>
               </a:rPr>
-              <a:t>(የሰው ፍቅር) ተግባር ላይ ሲያመጡት በአጠገቡ አያልፍም</a:t>
+              <a:t>የሰው ፍቅር ተግባር ላይ ሲያመጡት በአጠገቡ አያልፍም</a:t>
             </a:r>
           </a:p>
         </p:txBody>
@@ -3718,7 +3718,7 @@
                 <a:ea typeface="Ebrima"/>
                 <a:cs typeface="Ebrima"/>
               </a:rPr>
-              <a:t>መስቀል ላይ ወጥቶ ነው (2x)</a:t>
+              <a:t>መስቀል ላይ ወጥቶ ነው 2x</a:t>
             </a:r>
           </a:p>
         </p:txBody>
@@ -3785,7 +3785,7 @@
                 <a:ea typeface="Ebrima"/>
                 <a:cs typeface="Ebrima"/>
               </a:rPr>
-              <a:t>ፍቅር (7x) ፍቅር (7x)</a:t>
+              <a:t>ፍቅር 7x ፍቅር 7x</a:t>
             </a:r>
           </a:p>
           <a:p>
@@ -3803,7 +3803,7 @@
                 <a:ea typeface="Ebrima"/>
                 <a:cs typeface="Ebrima"/>
               </a:rPr>
-              <a:t>(የሰው ፍቅር) ከተነካ ጥቅሙ</a:t>
+              <a:t>የሰው ፍቅር ከተነካ ጥቅሙ</a:t>
             </a:r>
           </a:p>
           <a:p>
@@ -3821,7 +3821,7 @@
                 <a:ea typeface="Ebrima"/>
                 <a:cs typeface="Ebrima"/>
               </a:rPr>
-              <a:t>(የሰው ፍቅር) ይጠፋል አቅሙ</a:t>
+              <a:t>የሰው ፍቅር ይጠፋል አቅሙ</a:t>
             </a:r>
           </a:p>
           <a:p>
@@ -3839,7 +3839,7 @@
                 <a:ea typeface="Ebrima"/>
                 <a:cs typeface="Ebrima"/>
               </a:rPr>
-              <a:t>(የሰው ፍቅር) የወደደ ይመስላል</a:t>
+              <a:t>የሰው ፍቅር የወደደ ይመስላል</a:t>
             </a:r>
           </a:p>
           <a:p>
@@ -3857,7 +3857,7 @@
                 <a:ea typeface="Ebrima"/>
                 <a:cs typeface="Ebrima"/>
               </a:rPr>
-              <a:t>(የሰው ፍቅር) ከመጥላት ከማጥፋት መቼ ይመለሳል</a:t>
+              <a:t>የሰው ፍቅር ከመጥላት ከማጥፋት መቼ ይመለሳል</a:t>
             </a:r>
           </a:p>
         </p:txBody>
@@ -3960,7 +3960,7 @@
                 <a:ea typeface="Ebrima"/>
                 <a:cs typeface="Ebrima"/>
               </a:rPr>
-              <a:t>ወዶ አድኖን ነው (2x)</a:t>
+              <a:t>ወዶ አድኖን ነው 2x</a:t>
             </a:r>
           </a:p>
         </p:txBody>
@@ -4027,7 +4027,7 @@
                 <a:ea typeface="Ebrima"/>
                 <a:cs typeface="Ebrima"/>
               </a:rPr>
-              <a:t>ፍቅር (7x) ፍቅር (7x)</a:t>
+              <a:t>ፍቅር 7x ፍቅር 7x</a:t>
             </a:r>
           </a:p>
           <a:p>
